--- a/Lesson36-PlanAndExecute/Lesson36-PlanAndExecute.pptx
+++ b/Lesson36-PlanAndExecute/Lesson36-PlanAndExecute.pptx
@@ -951,7 +951,7 @@
           <a:p>
             <a:r>
               <a:rPr lang="en-US" dirty="0"/>
-              <a:t>For a replanning demo to mean anything, the first plan needs a genuine, reproducible reason to fail, not a coin flip. SimulatedDeploymentEnvironment encodes one undocumented operational rule. It walks the plan's steps in order. A step that mentions both pause and archiver sets a flag. Any step that mentions migrat or schema before that flag is set fails, with a message saying ArchiverJob holds a lock on the orders table and must be paused before any schema change step runs. The check is plain lowercase keyword matching, not a model judgment, so the same plan always produces the same result. The goal never mentions an archiver job. A planner working from general knowledge will propose something reasonable like backup, migrate, verify, cut over, and that reasonable plan will still fail against reality. That is exactly the situation closed-loop planning exists for.</a:t>
+              <a:t>For a replanning demo to mean anything, the first plan needs a genuine, reproducible reason to fail, not a coin flip. SimulatedDeploymentEnvironment encodes one undocumented operational rule. It walks the plan's steps in order. A step that mentions both pause and archiver sets a flag. Any step that mentions migrat or schema before that flag is set fails, with a message saying ArchiverJob holds a lock on the orders table and must be paused before any schema change step runs. The check is plain lowercase keyword matching, not a model judgment, so the same plan always produces the same result. One more rule: a plan with no steps at all fails before any keyword check, so a plan the Planner couldn't produce can never report success. The goal never mentions an archiver job. A planner working from general knowledge will propose something reasonable like backup, migrate, verify, cut over, and that reasonable plan will still fail against reality. That is exactly the situation closed-loop planning exists for.</a:t>
             </a:r>
             <a:endParaRPr lang="en-US" dirty="0"/>
           </a:p>
@@ -1127,7 +1127,7 @@
           <a:p>
             <a:r>
               <a:rPr lang="en-US" dirty="0"/>
-              <a:t>Look at what GeneratePlanAsync does with the failure context. It doesn't append an instruction like fix it by pausing the archiver, and the code never touches the plan once a failure comes back. It adds a block to the prompt that says a previous attempt failed, quotes the entire natural-language failure message, and asks the model to regenerate the full plan from scratch, incorporating whatever step is needed to avoid that exact failure, and not to just repeat the failed step. That one string is the only channel back to the Planner, exactly the way a real deploy tool's error output would look. If the Planner needed the rule spelled out structurally, this wouldn't be replanning, it would be configuration. The plan comes back as typed JSON through ResponseFormat set to the ExecutionPlan type, at a temperature of 0.3, with a safe fallback if the JSON can't be parsed.</a:t>
+              <a:t>Look at what GeneratePlanAsync does with the failure context. It doesn't append an instruction like fix it by pausing the archiver, and the code never touches the plan once a failure comes back. It adds a block to the prompt that says a previous attempt failed, quotes the entire natural-language failure message, and asks the model to regenerate the full plan from scratch, incorporating whatever step is needed to avoid that exact failure, and not to just repeat the failed step. That one string is the only channel back to the Planner, exactly the way a real deploy tool's error output would look. If the Planner needed the rule spelled out structurally, this wouldn't be replanning, it would be configuration. The plan comes back as typed JSON through ResponseFormat set to the ExecutionPlan type, at a temperature of 0.3. If the JSON can't be parsed, the Planner returns an empty plan, which RunPlan treats as a failure, so it is replanned like any other failure instead of slipping through as a success.</a:t>
             </a:r>
             <a:endParaRPr lang="en-US" dirty="0"/>
           </a:p>
